--- a/Informe_DIVAL_2025.pptx
+++ b/Informe_DIVAL_2025.pptx
@@ -2181,7 +2181,7 @@
                   <c:v>4 ESTRELLAS</c:v>
                 </c:pt>
                 <c:pt idx="5">
-                  <c:v/>
+                  <c:v>SIN CATEG.</c:v>
                 </c:pt>
                 <c:pt idx="6">
                   <c:v>5 ESTRELLAS</c:v>
@@ -15347,7 +15347,7 @@
                 <a:latin typeface="Montserrat" pitchFamily="2" charset="77"/>
                 <a:cs typeface="Times New Roman" panose="02020603050405020304" pitchFamily="18" charset="0"/>
               </a:rPr>
-              <a:t>La provincia de Valencia registró 7.098.741 turistas en 2025 (-10.1% respecto a 2024). El turismo internacional alcanzó 3.605.939 visitantes (++13.6%), consolidando la recuperación post-pandémica. El turismo nacional registró 3.492.802 viajeros.</a:t>
+              <a:t>La provincia de Valencia registró 7.098.741 turistas en 2025 (-10.1% respecto a 2024). El turismo internacional alcanzó 3.605.939 visitantes (+13.6%), consolidando la recuperación post-pandémica. El turismo nacional registró 3.492.802 viajeros.</a:t>
             </a:r>
           </a:p>
         </p:txBody>
